--- a/esp32-class-projects/02_sessions/slides/2회차_센서와_웹기본기.pptx
+++ b/esp32-class-projects/02_sessions/slides/2회차_센서와_웹기본기.pptx
@@ -14792,7 +14792,7 @@
                 <a:ea typeface="Pretendard" pitchFamily="34" charset="-122"/>
                 <a:cs typeface="Pretendard" pitchFamily="34" charset="-120"/>
               </a:rPr>
-              <a:t>물체가 10cm 안으로 접근하면 LCD에 WARNING!! + LED 점멸, 멀어지면 SAFE 표시와 함께 조용해져요</a:t>
+              <a:t>물체가 10cm 안으로 접근하면 LED 점멸 + 시리얼 WARNING!!, 멀어지면 SAFE — 7세그엔 거리(cm)가 실시간 표시돼요</a:t>
             </a:r>
             <a:endParaRPr lang="en-US" sz="1500" dirty="0"/>
           </a:p>
